--- a/ゲーム科1年/00_前期/プログラミングⅡ/08_関数.pptx
+++ b/ゲーム科1年/00_前期/プログラミングⅡ/08_関数.pptx
@@ -267,7 +267,7 @@
           <a:p>
             <a:fld id="{E9CC885B-4903-4D54-9A93-00025F12DED9}" type="datetimeFigureOut">
               <a:rPr kumimoji="1" lang="ja-JP" altLang="en-US" smtClean="0"/>
-              <a:t>2024/11/17</a:t>
+              <a:t>2025/2/27</a:t>
             </a:fld>
             <a:endParaRPr kumimoji="1" lang="ja-JP" altLang="en-US"/>
           </a:p>
@@ -497,7 +497,7 @@
           <a:p>
             <a:fld id="{E9CC885B-4903-4D54-9A93-00025F12DED9}" type="datetimeFigureOut">
               <a:rPr kumimoji="1" lang="ja-JP" altLang="en-US" smtClean="0"/>
-              <a:t>2024/11/17</a:t>
+              <a:t>2025/2/27</a:t>
             </a:fld>
             <a:endParaRPr kumimoji="1" lang="ja-JP" altLang="en-US"/>
           </a:p>
@@ -737,7 +737,7 @@
           <a:p>
             <a:fld id="{E9CC885B-4903-4D54-9A93-00025F12DED9}" type="datetimeFigureOut">
               <a:rPr kumimoji="1" lang="ja-JP" altLang="en-US" smtClean="0"/>
-              <a:t>2024/11/17</a:t>
+              <a:t>2025/2/27</a:t>
             </a:fld>
             <a:endParaRPr kumimoji="1" lang="ja-JP" altLang="en-US"/>
           </a:p>
@@ -967,7 +967,7 @@
           <a:p>
             <a:fld id="{E9CC885B-4903-4D54-9A93-00025F12DED9}" type="datetimeFigureOut">
               <a:rPr kumimoji="1" lang="ja-JP" altLang="en-US" smtClean="0"/>
-              <a:t>2024/11/17</a:t>
+              <a:t>2025/2/27</a:t>
             </a:fld>
             <a:endParaRPr kumimoji="1" lang="ja-JP" altLang="en-US"/>
           </a:p>
@@ -1242,7 +1242,7 @@
           <a:p>
             <a:fld id="{E9CC885B-4903-4D54-9A93-00025F12DED9}" type="datetimeFigureOut">
               <a:rPr kumimoji="1" lang="ja-JP" altLang="en-US" smtClean="0"/>
-              <a:t>2024/11/17</a:t>
+              <a:t>2025/2/27</a:t>
             </a:fld>
             <a:endParaRPr kumimoji="1" lang="ja-JP" altLang="en-US"/>
           </a:p>
@@ -1571,7 +1571,7 @@
           <a:p>
             <a:fld id="{E9CC885B-4903-4D54-9A93-00025F12DED9}" type="datetimeFigureOut">
               <a:rPr kumimoji="1" lang="ja-JP" altLang="en-US" smtClean="0"/>
-              <a:t>2024/11/17</a:t>
+              <a:t>2025/2/27</a:t>
             </a:fld>
             <a:endParaRPr kumimoji="1" lang="ja-JP" altLang="en-US"/>
           </a:p>
@@ -2047,7 +2047,7 @@
           <a:p>
             <a:fld id="{E9CC885B-4903-4D54-9A93-00025F12DED9}" type="datetimeFigureOut">
               <a:rPr kumimoji="1" lang="ja-JP" altLang="en-US" smtClean="0"/>
-              <a:t>2024/11/17</a:t>
+              <a:t>2025/2/27</a:t>
             </a:fld>
             <a:endParaRPr kumimoji="1" lang="ja-JP" altLang="en-US"/>
           </a:p>
@@ -2188,7 +2188,7 @@
           <a:p>
             <a:fld id="{E9CC885B-4903-4D54-9A93-00025F12DED9}" type="datetimeFigureOut">
               <a:rPr kumimoji="1" lang="ja-JP" altLang="en-US" smtClean="0"/>
-              <a:t>2024/11/17</a:t>
+              <a:t>2025/2/27</a:t>
             </a:fld>
             <a:endParaRPr kumimoji="1" lang="ja-JP" altLang="en-US"/>
           </a:p>
@@ -2301,7 +2301,7 @@
           <a:p>
             <a:fld id="{E9CC885B-4903-4D54-9A93-00025F12DED9}" type="datetimeFigureOut">
               <a:rPr kumimoji="1" lang="ja-JP" altLang="en-US" smtClean="0"/>
-              <a:t>2024/11/17</a:t>
+              <a:t>2025/2/27</a:t>
             </a:fld>
             <a:endParaRPr kumimoji="1" lang="ja-JP" altLang="en-US"/>
           </a:p>
@@ -2644,7 +2644,7 @@
           <a:p>
             <a:fld id="{E9CC885B-4903-4D54-9A93-00025F12DED9}" type="datetimeFigureOut">
               <a:rPr kumimoji="1" lang="ja-JP" altLang="en-US" smtClean="0"/>
-              <a:t>2024/11/17</a:t>
+              <a:t>2025/2/27</a:t>
             </a:fld>
             <a:endParaRPr kumimoji="1" lang="ja-JP" altLang="en-US"/>
           </a:p>
@@ -2932,7 +2932,7 @@
           <a:p>
             <a:fld id="{E9CC885B-4903-4D54-9A93-00025F12DED9}" type="datetimeFigureOut">
               <a:rPr kumimoji="1" lang="ja-JP" altLang="en-US" smtClean="0"/>
-              <a:t>2024/11/17</a:t>
+              <a:t>2025/2/27</a:t>
             </a:fld>
             <a:endParaRPr kumimoji="1" lang="ja-JP" altLang="en-US"/>
           </a:p>
@@ -3205,7 +3205,7 @@
           <a:p>
             <a:fld id="{E9CC885B-4903-4D54-9A93-00025F12DED9}" type="datetimeFigureOut">
               <a:rPr kumimoji="1" lang="ja-JP" altLang="en-US" smtClean="0"/>
-              <a:t>2024/11/17</a:t>
+              <a:t>2025/2/27</a:t>
             </a:fld>
             <a:endParaRPr kumimoji="1" lang="ja-JP" altLang="en-US"/>
           </a:p>
@@ -5664,7 +5664,7 @@
         <p:spPr>
           <a:xfrm>
             <a:off x="567541" y="4274529"/>
-            <a:ext cx="7571303" cy="461665"/>
+            <a:ext cx="6955750" cy="461665"/>
           </a:xfrm>
           <a:prstGeom prst="rect">
             <a:avLst/>
@@ -5678,8 +5678,12 @@
           <a:lstStyle/>
           <a:p>
             <a:r>
+              <a:rPr lang="ja-JP" altLang="en-US" sz="2400"/>
+              <a:t>なるべくシンプル</a:t>
+            </a:r>
+            <a:r>
               <a:rPr lang="ja-JP" altLang="en-US" sz="2400" dirty="0"/>
-              <a:t>慣れてきたらシンプルに書けるようになりましょう。</a:t>
+              <a:t>に書けるようになりましょう。</a:t>
             </a:r>
             <a:endParaRPr lang="en-US" altLang="ja-JP" sz="2400" dirty="0"/>
           </a:p>
